--- a/Phishing atelier/Pieges_version_tres_simple.pptx
+++ b/Phishing atelier/Pieges_version_tres_simple.pptx
@@ -2068,6 +2068,46 @@
           </a:p>
         </p:txBody>
       </p:sp>
+      <p:sp>
+        <p:nvSpPr>
+          <p:cNvPr id="7" name="ZoneTexte 6">
+            <a:extLst>
+              <a:ext uri="{FF2B5EF4-FFF2-40B4-BE49-F238E27FC236}">
+                <a16:creationId xmlns:a16="http://schemas.microsoft.com/office/drawing/2014/main" id="{BEDEBBD9-D463-87D9-FCAE-E9C64D698238}"/>
+              </a:ext>
+            </a:extLst>
+          </p:cNvPr>
+          <p:cNvSpPr txBox="1"/>
+          <p:nvPr/>
+        </p:nvSpPr>
+        <p:spPr>
+          <a:xfrm>
+            <a:off x="0" y="6578600"/>
+            <a:ext cx="12192000" cy="230832"/>
+          </a:xfrm>
+          <a:prstGeom prst="rect">
+            <a:avLst/>
+          </a:prstGeom>
+          <a:noFill/>
+        </p:spPr>
+        <p:txBody>
+          <a:bodyPr vert="horz" rtlCol="0">
+            <a:spAutoFit/>
+          </a:bodyPr>
+          <a:lstStyle/>
+          <a:p>
+            <a:pPr algn="ctr"/>
+            <a:r>
+              <a:rPr lang="fr-FR" sz="900">
+                <a:solidFill>
+                  <a:srgbClr val="B4B4B4"/>
+                </a:solidFill>
+              </a:rPr>
+              <a:t>(c) titi_23 - mediateur-numerique.github.io - Reproduction interdite sans autorisation</a:t>
+            </a:r>
+          </a:p>
+        </p:txBody>
+      </p:sp>
     </p:spTree>
   </p:cSld>
   <p:clrMapOvr>
@@ -2302,6 +2342,46 @@
           </a:p>
         </p:txBody>
       </p:sp>
+      <p:sp>
+        <p:nvSpPr>
+          <p:cNvPr id="7" name="ZoneTexte 6">
+            <a:extLst>
+              <a:ext uri="{FF2B5EF4-FFF2-40B4-BE49-F238E27FC236}">
+                <a16:creationId xmlns:a16="http://schemas.microsoft.com/office/drawing/2014/main" id="{B02AFAC7-1112-9D26-8F8B-110E382D6129}"/>
+              </a:ext>
+            </a:extLst>
+          </p:cNvPr>
+          <p:cNvSpPr txBox="1"/>
+          <p:nvPr/>
+        </p:nvSpPr>
+        <p:spPr>
+          <a:xfrm>
+            <a:off x="0" y="6578600"/>
+            <a:ext cx="12192000" cy="230832"/>
+          </a:xfrm>
+          <a:prstGeom prst="rect">
+            <a:avLst/>
+          </a:prstGeom>
+          <a:noFill/>
+        </p:spPr>
+        <p:txBody>
+          <a:bodyPr vert="horz" rtlCol="0">
+            <a:spAutoFit/>
+          </a:bodyPr>
+          <a:lstStyle/>
+          <a:p>
+            <a:pPr algn="ctr"/>
+            <a:r>
+              <a:rPr lang="fr-FR" sz="900">
+                <a:solidFill>
+                  <a:srgbClr val="B4B4B4"/>
+                </a:solidFill>
+              </a:rPr>
+              <a:t>(c) titi_23 - mediateur-numerique.github.io - Reproduction interdite sans autorisation</a:t>
+            </a:r>
+          </a:p>
+        </p:txBody>
+      </p:sp>
     </p:spTree>
   </p:cSld>
   <p:clrMapOvr>
@@ -2497,6 +2577,46 @@
           </a:p>
         </p:txBody>
       </p:sp>
+      <p:sp>
+        <p:nvSpPr>
+          <p:cNvPr id="6" name="ZoneTexte 5">
+            <a:extLst>
+              <a:ext uri="{FF2B5EF4-FFF2-40B4-BE49-F238E27FC236}">
+                <a16:creationId xmlns:a16="http://schemas.microsoft.com/office/drawing/2014/main" id="{29722F72-E803-B75D-720E-B187C89A47C4}"/>
+              </a:ext>
+            </a:extLst>
+          </p:cNvPr>
+          <p:cNvSpPr txBox="1"/>
+          <p:nvPr/>
+        </p:nvSpPr>
+        <p:spPr>
+          <a:xfrm>
+            <a:off x="0" y="6578600"/>
+            <a:ext cx="12192000" cy="230832"/>
+          </a:xfrm>
+          <a:prstGeom prst="rect">
+            <a:avLst/>
+          </a:prstGeom>
+          <a:noFill/>
+        </p:spPr>
+        <p:txBody>
+          <a:bodyPr vert="horz" rtlCol="0">
+            <a:spAutoFit/>
+          </a:bodyPr>
+          <a:lstStyle/>
+          <a:p>
+            <a:pPr algn="ctr"/>
+            <a:r>
+              <a:rPr lang="fr-FR" sz="900">
+                <a:solidFill>
+                  <a:srgbClr val="B4B4B4"/>
+                </a:solidFill>
+              </a:rPr>
+              <a:t>(c) titi_23 - mediateur-numerique.github.io - Reproduction interdite sans autorisation</a:t>
+            </a:r>
+          </a:p>
+        </p:txBody>
+      </p:sp>
     </p:spTree>
   </p:cSld>
   <p:clrMapOvr>
@@ -2692,6 +2812,46 @@
           </a:p>
         </p:txBody>
       </p:sp>
+      <p:sp>
+        <p:nvSpPr>
+          <p:cNvPr id="6" name="ZoneTexte 5">
+            <a:extLst>
+              <a:ext uri="{FF2B5EF4-FFF2-40B4-BE49-F238E27FC236}">
+                <a16:creationId xmlns:a16="http://schemas.microsoft.com/office/drawing/2014/main" id="{0B0DC004-4424-16BA-BB37-647034AE0E96}"/>
+              </a:ext>
+            </a:extLst>
+          </p:cNvPr>
+          <p:cNvSpPr txBox="1"/>
+          <p:nvPr/>
+        </p:nvSpPr>
+        <p:spPr>
+          <a:xfrm>
+            <a:off x="0" y="6578600"/>
+            <a:ext cx="12192000" cy="230832"/>
+          </a:xfrm>
+          <a:prstGeom prst="rect">
+            <a:avLst/>
+          </a:prstGeom>
+          <a:noFill/>
+        </p:spPr>
+        <p:txBody>
+          <a:bodyPr vert="horz" rtlCol="0">
+            <a:spAutoFit/>
+          </a:bodyPr>
+          <a:lstStyle/>
+          <a:p>
+            <a:pPr algn="ctr"/>
+            <a:r>
+              <a:rPr lang="fr-FR" sz="900">
+                <a:solidFill>
+                  <a:srgbClr val="B4B4B4"/>
+                </a:solidFill>
+              </a:rPr>
+              <a:t>(c) titi_23 - mediateur-numerique.github.io - Reproduction interdite sans autorisation</a:t>
+            </a:r>
+          </a:p>
+        </p:txBody>
+      </p:sp>
     </p:spTree>
   </p:cSld>
   <p:clrMapOvr>
@@ -2887,6 +3047,46 @@
           </a:p>
         </p:txBody>
       </p:sp>
+      <p:sp>
+        <p:nvSpPr>
+          <p:cNvPr id="6" name="ZoneTexte 5">
+            <a:extLst>
+              <a:ext uri="{FF2B5EF4-FFF2-40B4-BE49-F238E27FC236}">
+                <a16:creationId xmlns:a16="http://schemas.microsoft.com/office/drawing/2014/main" id="{8CB309FC-E181-3533-CBAE-E461051FBD5C}"/>
+              </a:ext>
+            </a:extLst>
+          </p:cNvPr>
+          <p:cNvSpPr txBox="1"/>
+          <p:nvPr/>
+        </p:nvSpPr>
+        <p:spPr>
+          <a:xfrm>
+            <a:off x="0" y="6578600"/>
+            <a:ext cx="12192000" cy="230832"/>
+          </a:xfrm>
+          <a:prstGeom prst="rect">
+            <a:avLst/>
+          </a:prstGeom>
+          <a:noFill/>
+        </p:spPr>
+        <p:txBody>
+          <a:bodyPr vert="horz" rtlCol="0">
+            <a:spAutoFit/>
+          </a:bodyPr>
+          <a:lstStyle/>
+          <a:p>
+            <a:pPr algn="ctr"/>
+            <a:r>
+              <a:rPr lang="fr-FR" sz="900">
+                <a:solidFill>
+                  <a:srgbClr val="B4B4B4"/>
+                </a:solidFill>
+              </a:rPr>
+              <a:t>(c) titi_23 - mediateur-numerique.github.io - Reproduction interdite sans autorisation</a:t>
+            </a:r>
+          </a:p>
+        </p:txBody>
+      </p:sp>
     </p:spTree>
   </p:cSld>
   <p:clrMapOvr>
@@ -3355,6 +3555,46 @@
           </a:p>
         </p:txBody>
       </p:sp>
+      <p:sp>
+        <p:nvSpPr>
+          <p:cNvPr id="15" name="ZoneTexte 14">
+            <a:extLst>
+              <a:ext uri="{FF2B5EF4-FFF2-40B4-BE49-F238E27FC236}">
+                <a16:creationId xmlns:a16="http://schemas.microsoft.com/office/drawing/2014/main" id="{819EC9A1-5F5F-053D-EE26-34487D931EE9}"/>
+              </a:ext>
+            </a:extLst>
+          </p:cNvPr>
+          <p:cNvSpPr txBox="1"/>
+          <p:nvPr/>
+        </p:nvSpPr>
+        <p:spPr>
+          <a:xfrm>
+            <a:off x="0" y="6578600"/>
+            <a:ext cx="12192000" cy="230832"/>
+          </a:xfrm>
+          <a:prstGeom prst="rect">
+            <a:avLst/>
+          </a:prstGeom>
+          <a:noFill/>
+        </p:spPr>
+        <p:txBody>
+          <a:bodyPr vert="horz" rtlCol="0">
+            <a:spAutoFit/>
+          </a:bodyPr>
+          <a:lstStyle/>
+          <a:p>
+            <a:pPr algn="ctr"/>
+            <a:r>
+              <a:rPr lang="fr-FR" sz="900">
+                <a:solidFill>
+                  <a:srgbClr val="B4B4B4"/>
+                </a:solidFill>
+              </a:rPr>
+              <a:t>(c) titi_23 - mediateur-numerique.github.io - Reproduction interdite sans autorisation</a:t>
+            </a:r>
+          </a:p>
+        </p:txBody>
+      </p:sp>
     </p:spTree>
   </p:cSld>
   <p:clrMapOvr>
@@ -3524,6 +3764,46 @@
           </a:p>
         </p:txBody>
       </p:sp>
+      <p:sp>
+        <p:nvSpPr>
+          <p:cNvPr id="6" name="ZoneTexte 5">
+            <a:extLst>
+              <a:ext uri="{FF2B5EF4-FFF2-40B4-BE49-F238E27FC236}">
+                <a16:creationId xmlns:a16="http://schemas.microsoft.com/office/drawing/2014/main" id="{0FF7DDC1-6F06-38C2-98BC-87922797B7E0}"/>
+              </a:ext>
+            </a:extLst>
+          </p:cNvPr>
+          <p:cNvSpPr txBox="1"/>
+          <p:nvPr/>
+        </p:nvSpPr>
+        <p:spPr>
+          <a:xfrm>
+            <a:off x="0" y="6578600"/>
+            <a:ext cx="12192000" cy="230832"/>
+          </a:xfrm>
+          <a:prstGeom prst="rect">
+            <a:avLst/>
+          </a:prstGeom>
+          <a:noFill/>
+        </p:spPr>
+        <p:txBody>
+          <a:bodyPr vert="horz" rtlCol="0">
+            <a:spAutoFit/>
+          </a:bodyPr>
+          <a:lstStyle/>
+          <a:p>
+            <a:pPr algn="ctr"/>
+            <a:r>
+              <a:rPr lang="fr-FR" sz="900">
+                <a:solidFill>
+                  <a:srgbClr val="B4B4B4"/>
+                </a:solidFill>
+              </a:rPr>
+              <a:t>(c) titi_23 - mediateur-numerique.github.io - Reproduction interdite sans autorisation</a:t>
+            </a:r>
+          </a:p>
+        </p:txBody>
+      </p:sp>
     </p:spTree>
   </p:cSld>
   <p:clrMapOvr>
@@ -3719,6 +3999,46 @@
           </a:p>
         </p:txBody>
       </p:sp>
+      <p:sp>
+        <p:nvSpPr>
+          <p:cNvPr id="6" name="ZoneTexte 5">
+            <a:extLst>
+              <a:ext uri="{FF2B5EF4-FFF2-40B4-BE49-F238E27FC236}">
+                <a16:creationId xmlns:a16="http://schemas.microsoft.com/office/drawing/2014/main" id="{05681647-DDDE-6CCB-60AE-99F84E64FD15}"/>
+              </a:ext>
+            </a:extLst>
+          </p:cNvPr>
+          <p:cNvSpPr txBox="1"/>
+          <p:nvPr/>
+        </p:nvSpPr>
+        <p:spPr>
+          <a:xfrm>
+            <a:off x="0" y="6578600"/>
+            <a:ext cx="12192000" cy="230832"/>
+          </a:xfrm>
+          <a:prstGeom prst="rect">
+            <a:avLst/>
+          </a:prstGeom>
+          <a:noFill/>
+        </p:spPr>
+        <p:txBody>
+          <a:bodyPr vert="horz" rtlCol="0">
+            <a:spAutoFit/>
+          </a:bodyPr>
+          <a:lstStyle/>
+          <a:p>
+            <a:pPr algn="ctr"/>
+            <a:r>
+              <a:rPr lang="fr-FR" sz="900">
+                <a:solidFill>
+                  <a:srgbClr val="B4B4B4"/>
+                </a:solidFill>
+              </a:rPr>
+              <a:t>(c) titi_23 - mediateur-numerique.github.io - Reproduction interdite sans autorisation</a:t>
+            </a:r>
+          </a:p>
+        </p:txBody>
+      </p:sp>
     </p:spTree>
   </p:cSld>
   <p:clrMapOvr>
@@ -3914,6 +4234,46 @@
           </a:p>
         </p:txBody>
       </p:sp>
+      <p:sp>
+        <p:nvSpPr>
+          <p:cNvPr id="6" name="ZoneTexte 5">
+            <a:extLst>
+              <a:ext uri="{FF2B5EF4-FFF2-40B4-BE49-F238E27FC236}">
+                <a16:creationId xmlns:a16="http://schemas.microsoft.com/office/drawing/2014/main" id="{1453978E-7338-2B46-8B63-6678728C7788}"/>
+              </a:ext>
+            </a:extLst>
+          </p:cNvPr>
+          <p:cNvSpPr txBox="1"/>
+          <p:nvPr/>
+        </p:nvSpPr>
+        <p:spPr>
+          <a:xfrm>
+            <a:off x="0" y="6578600"/>
+            <a:ext cx="12192000" cy="230832"/>
+          </a:xfrm>
+          <a:prstGeom prst="rect">
+            <a:avLst/>
+          </a:prstGeom>
+          <a:noFill/>
+        </p:spPr>
+        <p:txBody>
+          <a:bodyPr vert="horz" rtlCol="0">
+            <a:spAutoFit/>
+          </a:bodyPr>
+          <a:lstStyle/>
+          <a:p>
+            <a:pPr algn="ctr"/>
+            <a:r>
+              <a:rPr lang="fr-FR" sz="900">
+                <a:solidFill>
+                  <a:srgbClr val="B4B4B4"/>
+                </a:solidFill>
+              </a:rPr>
+              <a:t>(c) titi_23 - mediateur-numerique.github.io - Reproduction interdite sans autorisation</a:t>
+            </a:r>
+          </a:p>
+        </p:txBody>
+      </p:sp>
     </p:spTree>
   </p:cSld>
   <p:clrMapOvr>
@@ -4277,6 +4637,46 @@
           </a:p>
         </p:txBody>
       </p:sp>
+      <p:sp>
+        <p:nvSpPr>
+          <p:cNvPr id="12" name="ZoneTexte 11">
+            <a:extLst>
+              <a:ext uri="{FF2B5EF4-FFF2-40B4-BE49-F238E27FC236}">
+                <a16:creationId xmlns:a16="http://schemas.microsoft.com/office/drawing/2014/main" id="{457B7BA7-98CB-630C-7D61-73EA5DDD768C}"/>
+              </a:ext>
+            </a:extLst>
+          </p:cNvPr>
+          <p:cNvSpPr txBox="1"/>
+          <p:nvPr/>
+        </p:nvSpPr>
+        <p:spPr>
+          <a:xfrm>
+            <a:off x="0" y="6578600"/>
+            <a:ext cx="12192000" cy="230832"/>
+          </a:xfrm>
+          <a:prstGeom prst="rect">
+            <a:avLst/>
+          </a:prstGeom>
+          <a:noFill/>
+        </p:spPr>
+        <p:txBody>
+          <a:bodyPr vert="horz" rtlCol="0">
+            <a:spAutoFit/>
+          </a:bodyPr>
+          <a:lstStyle/>
+          <a:p>
+            <a:pPr algn="ctr"/>
+            <a:r>
+              <a:rPr lang="fr-FR" sz="900">
+                <a:solidFill>
+                  <a:srgbClr val="B4B4B4"/>
+                </a:solidFill>
+              </a:rPr>
+              <a:t>(c) titi_23 - mediateur-numerique.github.io - Reproduction interdite sans autorisation</a:t>
+            </a:r>
+          </a:p>
+        </p:txBody>
+      </p:sp>
     </p:spTree>
   </p:cSld>
   <p:clrMapOvr>
@@ -4491,6 +4891,46 @@
           </a:p>
         </p:txBody>
       </p:sp>
+      <p:sp>
+        <p:nvSpPr>
+          <p:cNvPr id="7" name="ZoneTexte 6">
+            <a:extLst>
+              <a:ext uri="{FF2B5EF4-FFF2-40B4-BE49-F238E27FC236}">
+                <a16:creationId xmlns:a16="http://schemas.microsoft.com/office/drawing/2014/main" id="{CAE41565-58D1-0E78-5911-BC7FD9B3F5F4}"/>
+              </a:ext>
+            </a:extLst>
+          </p:cNvPr>
+          <p:cNvSpPr txBox="1"/>
+          <p:nvPr/>
+        </p:nvSpPr>
+        <p:spPr>
+          <a:xfrm>
+            <a:off x="0" y="6578600"/>
+            <a:ext cx="12192000" cy="230832"/>
+          </a:xfrm>
+          <a:prstGeom prst="rect">
+            <a:avLst/>
+          </a:prstGeom>
+          <a:noFill/>
+        </p:spPr>
+        <p:txBody>
+          <a:bodyPr vert="horz" rtlCol="0">
+            <a:spAutoFit/>
+          </a:bodyPr>
+          <a:lstStyle/>
+          <a:p>
+            <a:pPr algn="ctr"/>
+            <a:r>
+              <a:rPr lang="fr-FR" sz="900">
+                <a:solidFill>
+                  <a:srgbClr val="B4B4B4"/>
+                </a:solidFill>
+              </a:rPr>
+              <a:t>(c) titi_23 - mediateur-numerique.github.io - Reproduction interdite sans autorisation</a:t>
+            </a:r>
+          </a:p>
+        </p:txBody>
+      </p:sp>
     </p:spTree>
   </p:cSld>
   <p:clrMapOvr>
@@ -4705,6 +5145,46 @@
           </a:p>
         </p:txBody>
       </p:sp>
+      <p:sp>
+        <p:nvSpPr>
+          <p:cNvPr id="7" name="ZoneTexte 6">
+            <a:extLst>
+              <a:ext uri="{FF2B5EF4-FFF2-40B4-BE49-F238E27FC236}">
+                <a16:creationId xmlns:a16="http://schemas.microsoft.com/office/drawing/2014/main" id="{423E62A7-2F8A-C162-B0DF-4898F7E4E99B}"/>
+              </a:ext>
+            </a:extLst>
+          </p:cNvPr>
+          <p:cNvSpPr txBox="1"/>
+          <p:nvPr/>
+        </p:nvSpPr>
+        <p:spPr>
+          <a:xfrm>
+            <a:off x="0" y="6578600"/>
+            <a:ext cx="12192000" cy="230832"/>
+          </a:xfrm>
+          <a:prstGeom prst="rect">
+            <a:avLst/>
+          </a:prstGeom>
+          <a:noFill/>
+        </p:spPr>
+        <p:txBody>
+          <a:bodyPr vert="horz" rtlCol="0">
+            <a:spAutoFit/>
+          </a:bodyPr>
+          <a:lstStyle/>
+          <a:p>
+            <a:pPr algn="ctr"/>
+            <a:r>
+              <a:rPr lang="fr-FR" sz="900">
+                <a:solidFill>
+                  <a:srgbClr val="B4B4B4"/>
+                </a:solidFill>
+              </a:rPr>
+              <a:t>(c) titi_23 - mediateur-numerique.github.io - Reproduction interdite sans autorisation</a:t>
+            </a:r>
+          </a:p>
+        </p:txBody>
+      </p:sp>
     </p:spTree>
   </p:cSld>
   <p:clrMapOvr>
@@ -4939,6 +5419,46 @@
           </a:p>
         </p:txBody>
       </p:sp>
+      <p:sp>
+        <p:nvSpPr>
+          <p:cNvPr id="7" name="ZoneTexte 6">
+            <a:extLst>
+              <a:ext uri="{FF2B5EF4-FFF2-40B4-BE49-F238E27FC236}">
+                <a16:creationId xmlns:a16="http://schemas.microsoft.com/office/drawing/2014/main" id="{F1849C9B-2A2B-2196-5866-3F16BE5571A6}"/>
+              </a:ext>
+            </a:extLst>
+          </p:cNvPr>
+          <p:cNvSpPr txBox="1"/>
+          <p:nvPr/>
+        </p:nvSpPr>
+        <p:spPr>
+          <a:xfrm>
+            <a:off x="0" y="6578600"/>
+            <a:ext cx="12192000" cy="230832"/>
+          </a:xfrm>
+          <a:prstGeom prst="rect">
+            <a:avLst/>
+          </a:prstGeom>
+          <a:noFill/>
+        </p:spPr>
+        <p:txBody>
+          <a:bodyPr vert="horz" rtlCol="0">
+            <a:spAutoFit/>
+          </a:bodyPr>
+          <a:lstStyle/>
+          <a:p>
+            <a:pPr algn="ctr"/>
+            <a:r>
+              <a:rPr lang="fr-FR" sz="900">
+                <a:solidFill>
+                  <a:srgbClr val="B4B4B4"/>
+                </a:solidFill>
+              </a:rPr>
+              <a:t>(c) titi_23 - mediateur-numerique.github.io - Reproduction interdite sans autorisation</a:t>
+            </a:r>
+          </a:p>
+        </p:txBody>
+      </p:sp>
     </p:spTree>
   </p:cSld>
   <p:clrMapOvr>
@@ -5173,6 +5693,46 @@
           </a:p>
         </p:txBody>
       </p:sp>
+      <p:sp>
+        <p:nvSpPr>
+          <p:cNvPr id="7" name="ZoneTexte 6">
+            <a:extLst>
+              <a:ext uri="{FF2B5EF4-FFF2-40B4-BE49-F238E27FC236}">
+                <a16:creationId xmlns:a16="http://schemas.microsoft.com/office/drawing/2014/main" id="{FF746843-CE3A-3575-BE49-4F4389144330}"/>
+              </a:ext>
+            </a:extLst>
+          </p:cNvPr>
+          <p:cNvSpPr txBox="1"/>
+          <p:nvPr/>
+        </p:nvSpPr>
+        <p:spPr>
+          <a:xfrm>
+            <a:off x="0" y="6578600"/>
+            <a:ext cx="12192000" cy="230832"/>
+          </a:xfrm>
+          <a:prstGeom prst="rect">
+            <a:avLst/>
+          </a:prstGeom>
+          <a:noFill/>
+        </p:spPr>
+        <p:txBody>
+          <a:bodyPr vert="horz" rtlCol="0">
+            <a:spAutoFit/>
+          </a:bodyPr>
+          <a:lstStyle/>
+          <a:p>
+            <a:pPr algn="ctr"/>
+            <a:r>
+              <a:rPr lang="fr-FR" sz="900">
+                <a:solidFill>
+                  <a:srgbClr val="B4B4B4"/>
+                </a:solidFill>
+              </a:rPr>
+              <a:t>(c) titi_23 - mediateur-numerique.github.io - Reproduction interdite sans autorisation</a:t>
+            </a:r>
+          </a:p>
+        </p:txBody>
+      </p:sp>
     </p:spTree>
   </p:cSld>
   <p:clrMapOvr>
@@ -5404,6 +5964,46 @@
               <a:t>→ Piège. Appelez votre enfant pour vérifier.</a:t>
             </a:r>
             <a:endParaRPr lang="en-US" sz="3000" dirty="0"/>
+          </a:p>
+        </p:txBody>
+      </p:sp>
+      <p:sp>
+        <p:nvSpPr>
+          <p:cNvPr id="7" name="ZoneTexte 6">
+            <a:extLst>
+              <a:ext uri="{FF2B5EF4-FFF2-40B4-BE49-F238E27FC236}">
+                <a16:creationId xmlns:a16="http://schemas.microsoft.com/office/drawing/2014/main" id="{FE94C86C-EF55-534F-E8D7-15A857E7E48C}"/>
+              </a:ext>
+            </a:extLst>
+          </p:cNvPr>
+          <p:cNvSpPr txBox="1"/>
+          <p:nvPr/>
+        </p:nvSpPr>
+        <p:spPr>
+          <a:xfrm>
+            <a:off x="0" y="6578600"/>
+            <a:ext cx="12192000" cy="230832"/>
+          </a:xfrm>
+          <a:prstGeom prst="rect">
+            <a:avLst/>
+          </a:prstGeom>
+          <a:noFill/>
+        </p:spPr>
+        <p:txBody>
+          <a:bodyPr vert="horz" rtlCol="0">
+            <a:spAutoFit/>
+          </a:bodyPr>
+          <a:lstStyle/>
+          <a:p>
+            <a:pPr algn="ctr"/>
+            <a:r>
+              <a:rPr lang="fr-FR" sz="900">
+                <a:solidFill>
+                  <a:srgbClr val="B4B4B4"/>
+                </a:solidFill>
+              </a:rPr>
+              <a:t>(c) titi_23 - mediateur-numerique.github.io - Reproduction interdite sans autorisation</a:t>
+            </a:r>
           </a:p>
         </p:txBody>
       </p:sp>
